--- a/assets/apresentacao.pptx
+++ b/assets/apresentacao.pptx
@@ -13,7 +13,6 @@
     <p:sldId id="261" r:id="rId12"/>
     <p:sldId id="262" r:id="rId13"/>
     <p:sldId id="263" r:id="rId14"/>
-    <p:sldId id="264" r:id="rId15"/>
   </p:sldIdLst>
   <p:sldSz cx="9144000" cy="6858000" type="screen4x3"/>
   <p:notesSz cx="6858000" cy="9144000"/>
@@ -3103,28 +3102,7 @@
             <a:spLocks noGrp="1"/>
           </p:cNvSpPr>
           <p:nvPr>
-            <p:ph type="title"/>
-          </p:nvPr>
-        </p:nvSpPr>
-        <p:spPr/>
-        <p:txBody>
-          <a:bodyPr/>
-          <a:lstStyle/>
-          <a:p>
-            <a:r>
-              <a:t>UFCD 10790 – Projeto de Programação</a:t>
-            </a:r>
-          </a:p>
-        </p:txBody>
-      </p:sp>
-      <p:sp>
-        <p:nvSpPr>
-          <p:cNvPr id="3" name="Content Placeholder 2"/>
-          <p:cNvSpPr>
-            <a:spLocks noGrp="1"/>
-          </p:cNvSpPr>
-          <p:nvPr>
-            <p:ph idx="1"/>
+            <p:ph type="ctrTitle"/>
           </p:nvPr>
         </p:nvSpPr>
         <p:spPr/>
@@ -3134,6 +3112,27 @@
           <a:p>
             <a:r>
               <a:t>NutriFit Advisor</a:t>
+            </a:r>
+          </a:p>
+        </p:txBody>
+      </p:sp>
+      <p:sp>
+        <p:nvSpPr>
+          <p:cNvPr id="3" name="Subtitle 2"/>
+          <p:cNvSpPr>
+            <a:spLocks noGrp="1"/>
+          </p:cNvSpPr>
+          <p:nvPr>
+            <p:ph type="subTitle" idx="1"/>
+          </p:nvPr>
+        </p:nvSpPr>
+        <p:spPr/>
+        <p:txBody>
+          <a:bodyPr/>
+          <a:lstStyle/>
+          <a:p>
+            <a:r>
+              <a:t>UFCD 10790</a:t>
             </a:r>
           </a:p>
           <a:p>
@@ -3177,7 +3176,7 @@
           <a:lstStyle/>
           <a:p>
             <a:r>
-              <a:t>Problema Identificado</a:t>
+              <a:t>Objetivo</a:t>
             </a:r>
           </a:p>
         </p:txBody>
@@ -3198,7 +3197,7 @@
           <a:lstStyle/>
           <a:p>
             <a:r>
-              <a:t>Muitas pessoas escolhem suplementação sem critérios adequados.</a:t>
+              <a:t>Calcular IMC e recomendar suplementação.</a:t>
             </a:r>
           </a:p>
         </p:txBody>
@@ -3237,7 +3236,7 @@
           <a:lstStyle/>
           <a:p>
             <a:r>
-              <a:t>Objetivos</a:t>
+              <a:t>Funcionalidades</a:t>
             </a:r>
           </a:p>
         </p:txBody>
@@ -3258,17 +3257,22 @@
           <a:lstStyle/>
           <a:p>
             <a:r>
-              <a:t>• Calcular IMC</a:t>
-            </a:r>
-          </a:p>
-          <a:p>
-            <a:r>
-              <a:t>• Classificar IMC</a:t>
-            </a:r>
-          </a:p>
-          <a:p>
-            <a:r>
-              <a:t>• Recomendar suplementação</a:t>
+              <a:t>• IMC</a:t>
+            </a:r>
+          </a:p>
+          <a:p>
+            <a:r>
+              <a:t>• Classificação</a:t>
+            </a:r>
+          </a:p>
+          <a:p>
+            <a:r>
+              <a:t>• Objetivo</a:t>
+            </a:r>
+          </a:p>
+          <a:p>
+            <a:r>
+              <a:t>• Histórico</a:t>
             </a:r>
           </a:p>
         </p:txBody>
@@ -3307,7 +3311,7 @@
           <a:lstStyle/>
           <a:p>
             <a:r>
-              <a:t>Requisitos Implementados</a:t>
+              <a:t>Arquitetura</a:t>
             </a:r>
           </a:p>
         </p:txBody>
@@ -3328,7 +3332,7 @@
           <a:lstStyle/>
           <a:p>
             <a:r>
-              <a:t>Funcionais e Não Funcionais implementados.</a:t>
+              <a:t>UI → BLL → DAL</a:t>
             </a:r>
           </a:p>
         </p:txBody>
@@ -3367,7 +3371,7 @@
           <a:lstStyle/>
           <a:p>
             <a:r>
-              <a:t>Arquitetura</a:t>
+              <a:t>Tecnologias</a:t>
             </a:r>
           </a:p>
         </p:txBody>
@@ -3388,7 +3392,17 @@
           <a:lstStyle/>
           <a:p>
             <a:r>
-              <a:t>Ver diagrama_arquitetura.png.</a:t>
+              <a:t>Python</a:t>
+            </a:r>
+          </a:p>
+          <a:p>
+            <a:r>
+              <a:t>VS Code</a:t>
+            </a:r>
+          </a:p>
+          <a:p>
+            <a:r>
+              <a:t>GitHub</a:t>
             </a:r>
           </a:p>
         </p:txBody>
@@ -3427,7 +3441,7 @@
           <a:lstStyle/>
           <a:p>
             <a:r>
-              <a:t>Demonstração do Código</a:t>
+              <a:t>Testes</a:t>
             </a:r>
           </a:p>
         </p:txBody>
@@ -3448,7 +3462,7 @@
           <a:lstStyle/>
           <a:p>
             <a:r>
-              <a:t>Aplicação desenvolvida em Python no VS Code.</a:t>
+              <a:t>calcular_imc() e classificar_imc()</a:t>
             </a:r>
           </a:p>
         </p:txBody>
@@ -3487,7 +3501,7 @@
           <a:lstStyle/>
           <a:p>
             <a:r>
-              <a:t>Demonstração da Aplicação</a:t>
+              <a:t>Demonstração</a:t>
             </a:r>
           </a:p>
         </p:txBody>
@@ -3508,7 +3522,7 @@
           <a:lstStyle/>
           <a:p>
             <a:r>
-              <a:t>Exemplo de execução e relatório.</a:t>
+              <a:t>Executar a aplicação</a:t>
             </a:r>
           </a:p>
         </p:txBody>
@@ -3547,7 +3561,7 @@
           <a:lstStyle/>
           <a:p>
             <a:r>
-              <a:t>GitHub</a:t>
+              <a:t>Conclusão</a:t>
             </a:r>
           </a:p>
         </p:txBody>
@@ -3568,67 +3582,7 @@
           <a:lstStyle/>
           <a:p>
             <a:r>
-              <a:t>Fork, commits e controlo de versões.</a:t>
-            </a:r>
-          </a:p>
-        </p:txBody>
-      </p:sp>
-    </p:spTree>
-  </p:cSld>
-  <p:clrMapOvr>
-    <a:masterClrMapping/>
-  </p:clrMapOvr>
-</p:sld>
-</file>
-
-<file path=ppt/slides/slide9.xml><?xml version="1.0" encoding="utf-8"?>
-<p:sld xmlns:a="http://schemas.openxmlformats.org/drawingml/2006/main" xmlns:p="http://schemas.openxmlformats.org/presentationml/2006/main" xmlns:r="http://schemas.openxmlformats.org/officeDocument/2006/relationships">
-  <p:cSld>
-    <p:spTree>
-      <p:nvGrpSpPr>
-        <p:cNvPr id="1" name=""/>
-        <p:cNvGrpSpPr/>
-        <p:nvPr/>
-      </p:nvGrpSpPr>
-      <p:grpSpPr/>
-      <p:sp>
-        <p:nvSpPr>
-          <p:cNvPr id="2" name="Title 1"/>
-          <p:cNvSpPr>
-            <a:spLocks noGrp="1"/>
-          </p:cNvSpPr>
-          <p:nvPr>
-            <p:ph type="title"/>
-          </p:nvPr>
-        </p:nvSpPr>
-        <p:spPr/>
-        <p:txBody>
-          <a:bodyPr/>
-          <a:lstStyle/>
-          <a:p>
-            <a:r>
-              <a:t>Conclusão</a:t>
-            </a:r>
-          </a:p>
-        </p:txBody>
-      </p:sp>
-      <p:sp>
-        <p:nvSpPr>
-          <p:cNvPr id="3" name="Content Placeholder 2"/>
-          <p:cNvSpPr>
-            <a:spLocks noGrp="1"/>
-          </p:cNvSpPr>
-          <p:nvPr>
-            <p:ph idx="1"/>
-          </p:nvPr>
-        </p:nvSpPr>
-        <p:spPr/>
-        <p:txBody>
-          <a:bodyPr/>
-          <a:lstStyle/>
-          <a:p>
-            <a:r>
-              <a:t>Aplicação prática dos conhecimentos adquiridos.</a:t>
+              <a:t>Projeto concluído.</a:t>
             </a:r>
           </a:p>
         </p:txBody>
